--- a/slides/decks/s14-bleeding-thrombosis-kidney.pptx
+++ b/slides/decks/s14-bleeding-thrombosis-kidney.pptx
@@ -134,13 +134,13 @@
   <p:extLst>
     <p:ext uri="{521415D9-36F7-43E2-AB2F-B90AF26B5E84}">
       <p14:sectionLst xmlns:p14="http://schemas.microsoft.com/office/powerpoint/2010/main">
-        <p14:section name="Opening" id="{3d91346f-1823-e3ab-c860-abe5cae3d63d}">
+        <p14:section name="Opening" id="{59f20d23-4c85-0f78-ce67-01211b65e84b}">
           <p14:sldIdLst>
             <p14:sldId id="256"/>
             <p14:sldId id="257"/>
           </p14:sldIdLst>
         </p14:section>
-        <p14:section name="Thrombosis: risk and prophylaxis" id="{2bd4e115-d807-fad5-57be-228db984a910}">
+        <p14:section name="Thrombosis: risk and prophylaxis" id="{c6793dde-bedf-b609-a396-70437a39c02b}">
           <p14:sldIdLst>
             <p14:sldId id="258"/>
             <p14:sldId id="259"/>
@@ -149,7 +149,7 @@
             <p14:sldId id="262"/>
           </p14:sldIdLst>
         </p14:section>
-        <p14:section name="Treating VTE and CRT; bleeding" id="{9194be70-0705-68e8-54c8-6f19d450a258}">
+        <p14:section name="Treating VTE and CRT; bleeding" id="{e92ea498-cd8e-65e8-64a7-d0232a04bbfd}">
           <p14:sldIdLst>
             <p14:sldId id="263"/>
             <p14:sldId id="264"/>
@@ -157,7 +157,7 @@
             <p14:sldId id="266"/>
           </p14:sldIdLst>
         </p14:section>
-        <p14:section name="Haemorrhagic cystitis and kidney" id="{b355d92d-d662-0371-a605-d5dbadd1e1c3}">
+        <p14:section name="Haemorrhagic cystitis and kidney" id="{e87f1d6e-386b-6293-7fe1-6cfe485af7a1}">
           <p14:sldIdLst>
             <p14:sldId id="267"/>
             <p14:sldId id="268"/>
@@ -166,7 +166,7 @@
             <p14:sldId id="271"/>
           </p14:sldIdLst>
         </p14:section>
-        <p14:section name="Board questions" id="{c751afe8-ee58-74c7-0c46-a6c25d62914d}">
+        <p14:section name="Board questions" id="{1d13a208-853f-2f97-0124-dcf160dac742}">
           <p14:sldIdLst>
             <p14:sldId id="272"/>
             <p14:sldId id="273"/>
@@ -176,14 +176,14 @@
             <p14:sldId id="277"/>
           </p14:sldIdLst>
         </p14:section>
-        <p14:section name="References" id="{0ea36fe7-3802-a356-b009-e71caeffc5c8}">
+        <p14:section name="References" id="{aa04fe14-149b-5686-4f64-68a9f0b08f84}">
           <p14:sldIdLst>
             <p14:sldId id="278"/>
             <p14:sldId id="279"/>
             <p14:sldId id="280"/>
           </p14:sldIdLst>
         </p14:section>
-        <p14:section name="Backup" id="{402fb096-ec0a-7be2-cc1f-d2d8f48511f9}">
+        <p14:section name="Backup" id="{687fdcca-fa36-b127-a475-8d379c8263f6}">
           <p14:sldIdLst>
             <p14:sldId id="281"/>
             <p14:sldId id="282"/>
@@ -621,7 +621,7 @@
             </a:pPr>
             <a:r>
               <a:rPr lang="en-US" dirty="0"/>
-              <a:t>SOS/VOD 和 TA-TMA 雖然也算血栓性併發症，第 13 堂已經講過，今天只帶過。最後一樣留三題考題。</a:t>
+              <a:t>SOS/VOD 和 TA-TMA 雖然也算血栓性併發症，第 13 堂已經講過，今天只帶過。前半段以第 40 章為主，後半段是第 51 章，最後一樣留三題考題。</a:t>
             </a:r>
           </a:p>
         </p:txBody>
@@ -760,6 +760,17 @@
               <a:t>療程依 ACCP 指引，三個月或到拔管為止，取較長者，也有醫師在拔管後再多抗凝一到兩週。考題常見的錯誤選項是拔管之後就不用抗凝，這和書上的建議剛好相反。</a:t>
             </a:r>
           </a:p>
+          <a:p>
+            <a:pPr>
+              <a:spcAft>
+                <a:spcPts val="600"/>
+              </a:spcAft>
+            </a:pPr>
+            <a:r>
+              <a:rPr lang="en-US" dirty="0"/>
+              <a:t>VTE 的一般療程是三到六個月，CRT 則和導管綁在一起，管子留多久就抗凝多久，最少三個月，兩種療程不要混在一起。門診移植病人帶管的時間長，這一點特別重要。</a:t>
+            </a:r>
+          </a:p>
         </p:txBody>
       </p:sp>
       <p:sp>
@@ -896,6 +907,17 @@
               <a:t>預防性血小板輸注的慣例是低於 10 × 10⁹/L 就輸，不過預防性優於治療性輸注的證據只有低到中等。</a:t>
             </a:r>
           </a:p>
+          <a:p>
+            <a:pPr>
+              <a:spcAft>
+                <a:spcPts val="600"/>
+              </a:spcAft>
+            </a:pPr>
+            <a:r>
+              <a:rPr lang="en-US" dirty="0"/>
+              <a:t>Therapeutic anticoagulation 本身就是出血最強的預測因子，這又回到開頭那張，出血比血栓多，所以每次開始或繼續抗凝，都要重新看一次血小板。</a:t>
+            </a:r>
+          </a:p>
         </p:txBody>
       </p:sp>
       <p:sp>
@@ -1032,6 +1054,17 @@
               <a:t>底下是血尿分級，一級顯微、二級肉眼、三級有血塊、四級是血塊造成阻塞和腎衰竭。考題最常用發生時間來區分兩型，看到 engraftment 前後的血尿，就要想到晚發型。</a:t>
             </a:r>
           </a:p>
+          <a:p>
+            <a:pPr>
+              <a:spcAft>
+                <a:spcPts val="600"/>
+              </a:spcAft>
+            </a:pPr>
+            <a:r>
+              <a:rPr lang="en-US" dirty="0"/>
+              <a:t>病房實務上，PTCy 那幾天要確認 hyperhydration 和 mesna 有跟上；如果血尿出現在 engraftment 前後，就要送尿液和血漿的 BK，而不是先怪 CY。</a:t>
+            </a:r>
+          </a:p>
         </p:txBody>
       </p:sp>
       <p:sp>
@@ -1157,6 +1190,17 @@
               <a:t>最後一行是預測 BK-HC 的病毒量，尿液大於 10 的 7 次方 copies/mL，血漿大於 10 的 3 次方。這兩個數字下一張的診斷標準會再出現，考試很愛考。</a:t>
             </a:r>
           </a:p>
+          <a:p>
+            <a:pPr>
+              <a:spcAft>
+                <a:spcPts val="600"/>
+              </a:spcAft>
+            </a:pPr>
+            <a:r>
+              <a:rPr lang="en-US" dirty="0"/>
+              <a:t>病因是多重的，病毒的細胞病變、conditioning 的化學或放射傷害，加上 donor 的免疫反應攻擊膀胱黏膜，三者疊加。免疫抑制越深，BK 越容易複製。</a:t>
+            </a:r>
+          </a:p>
         </p:txBody>
       </p:sp>
       <p:sp>
@@ -1300,6 +1344,17 @@
               </a:spcAft>
             </a:pPr>
             <a:r>
+              <a:rPr lang="en-US" dirty="0"/>
+              <a:t>血尿分級的寫法書上有點不一致，分級表把二級定義為肉眼血尿，診斷標準卻寫大於二級，投影片直接寫肉眼血尿，避免混淆。</a:t>
+            </a:r>
+          </a:p>
+          <a:p>
+            <a:pPr>
+              <a:spcAft>
+                <a:spcPts val="600"/>
+              </a:spcAft>
+            </a:pPr>
+            <a:r>
               <a:rPr lang="en-US" b="1" dirty="0"/>
               <a:t>講者提醒（不念出來）：</a:t>
             </a:r>
@@ -1451,6 +1506,17 @@
               <a:t>最新的是 third-party MSC，七位病人有五位血尿緩解，以及事先冷凍保存的 BK virus-specific T cells，phase II 反應率 81 到 92%，沒有中重度 GVHD，在體內可以存活到 12 週，還需要更大的前瞻性研究確認。</a:t>
             </a:r>
           </a:p>
+          <a:p>
+            <a:pPr>
+              <a:spcAft>
+                <a:spcPts val="600"/>
+              </a:spcAft>
+            </a:pPr>
+            <a:r>
+              <a:rPr lang="en-US" dirty="0"/>
+              <a:t>這三種 cidofovir 給法沒有直接比較過，選擇時主要看腎功能。腎功能已經不好的病人，膀胱內灌注可以避開全身腎毒性。</a:t>
+            </a:r>
+          </a:p>
         </p:txBody>
       </p:sp>
       <p:sp>
@@ -1573,7 +1639,18 @@
             </a:pPr>
             <a:r>
               <a:rPr lang="en-US" dirty="0"/>
-              <a:t>AKI 沒有完全恢復、持續蛋白尿或高血壓的病人，之後慢性腎病、非復發死亡和整體死亡率都會增加。病因從腎前到腎後都有，backup 有一張整理。</a:t>
+              <a:t>AKI 沒有完全恢復、持續蛋白尿或高血壓的病人，之後慢性腎病、非復發死亡和整體死亡率都會增加。</a:t>
+            </a:r>
+          </a:p>
+          <a:p>
+            <a:pPr>
+              <a:spcAft>
+                <a:spcPts val="600"/>
+              </a:spcAft>
+            </a:pPr>
+            <a:r>
+              <a:rPr lang="en-US" dirty="0"/>
+              <a:t>病因方面，腎前性有 sepsis、engraftment syndrome 和 SOS，腎絲球是 TMA，腎小管是 ATN 和藥物，間質是 GVHD 和病毒，腎後性則是 BK 或腺病毒膀胱炎造成的阻塞，所以今天的 HC 也會回頭影響腎臟。完整表格在 backup。</a:t>
             </a:r>
           </a:p>
           <a:p>
@@ -1709,7 +1786,7 @@
             </a:pPr>
             <a:r>
               <a:rPr lang="en-US" dirty="0"/>
-              <a:t>選項有全劑量 enoxaparin、rivaroxaban、只放 IVC filter、靜脈 UFH，以及預防劑量 LMWH。哪一個是最適當的起始治療。</a:t>
+              <a:t>選項 A 是全劑量皮下 enoxaparin，B 是口服 rivaroxaban，C 是只放 IVC filter、不抗凝，D 是靜脈 unfractionated heparin，E 是預防劑量 LMWH，等 GVHD 好了再說。哪一個是最適當的起始治療。提示一下，題目裡每個數字都有用，包括血小板、腎功能和正在用的藥。</a:t>
             </a:r>
           </a:p>
           <a:p>
@@ -1837,6 +1914,17 @@
               <a:t>A 是主要陷阱，enoxaparin 在一般病人是第一選擇，但這裡腎功能不允許。B 的 DOAC，Table 40.1 寫目前不建議用在移植病人，內文雖然允許個案考慮，也要求腎功能足夠。C 的 IVC filter 只給不能抗凝的人。E 的預防劑量不足以治療 PE。療程三到六個月，惡性疾病還在就延長。</a:t>
             </a:r>
           </a:p>
+          <a:p>
+            <a:pPr>
+              <a:spcAft>
+                <a:spcPts val="600"/>
+              </a:spcAft>
+            </a:pPr>
+            <a:r>
+              <a:rPr lang="en-US" dirty="0"/>
+              <a:t>這題的思路和剛才的投影片一樣，先看血小板，再看 GFR。之後的維持治療可以改 warfarin，腎功能恢復後也可以用 LMWH。</a:t>
+            </a:r>
+          </a:p>
         </p:txBody>
       </p:sp>
       <p:sp>
@@ -1937,7 +2025,7 @@
             </a:pPr>
             <a:r>
               <a:rPr lang="en-US" dirty="0"/>
-              <a:t>第二題。45 歲女性，unrelated donor 移植後 day 75，右手腫，超音波顯示 tunnelled catheter 周圍有血栓。管子通暢，還要繼續打藥。血小板 85，腎功能正常，沒有出血。</a:t>
+              <a:t>第二題。45 歲女性，unrelated donor 移植後 day 75，右手腫，超音波顯示 tunnelled catheter 周圍有血栓。管子通暢，還要繼續打藥。血小板 85，腎功能正常，沒有出血。血栓本身有症狀，但沒有 PE 的表現。</a:t>
             </a:r>
           </a:p>
           <a:p>
@@ -1948,7 +2036,7 @@
             </a:pPr>
             <a:r>
               <a:rPr lang="en-US" dirty="0"/>
-              <a:t>選項 A 拔管不用抗凝，B 拔管加兩週 LMWH，C 保留導管、LMWH 三個月或到拔管為止，D 保留導管觀察，E 只給以後的導管做預防。</a:t>
+              <a:t>選項 A 拔管不用抗凝，B 拔管加兩週 LMWH，C 保留導管、LMWH 三個月或到拔管為止，D 保留導管觀察，E 只給以後的導管做預防。提示，注意管子還能不能用、還需不需要。這是門診移植很常見的情境。</a:t>
             </a:r>
           </a:p>
           <a:p>
@@ -2098,6 +2186,17 @@
               <a:t>最後三題考題。CAR-T 後的出血血栓，和 AKI 的病因與危險因子，放在 backup。</a:t>
             </a:r>
           </a:p>
+          <a:p>
+            <a:pPr>
+              <a:spcAft>
+                <a:spcPts val="600"/>
+              </a:spcAft>
+            </a:pPr>
+            <a:r>
+              <a:rPr lang="en-US" dirty="0"/>
+              <a:t>第 51 章篇幅不長，但 BK virus 的診斷門檻和 cidofovir 的給法，是很容易出題的地方。</a:t>
+            </a:r>
+          </a:p>
         </p:txBody>
       </p:sp>
       <p:sp>
@@ -2212,6 +2311,17 @@
               <a:t>A 和 B 是主要陷阱，很多人以為拔了管就解決了，但書上明確說急性 CRT 不論是否拔管都需要抗凝，兩週也太短。D 不抗凝會讓血栓往中央靜脈延伸。E 的 warfarin 預防，WARP 和 meta-analysis 都不支持常規使用，而且也沒有處理眼前的血栓。</a:t>
             </a:r>
           </a:p>
+          <a:p>
+            <a:pPr>
+              <a:spcAft>
+                <a:spcPts val="600"/>
+              </a:spcAft>
+            </a:pPr>
+            <a:r>
+              <a:rPr lang="en-US" dirty="0"/>
+              <a:t>Kovacs 的研究也支持這個做法，管子留著抗凝三個月，沒有新的血栓，一半以上的管子還能用。</a:t>
+            </a:r>
+          </a:p>
         </p:txBody>
       </p:sp>
       <p:sp>
@@ -2323,7 +2433,7 @@
             </a:pPr>
             <a:r>
               <a:rPr lang="en-US" dirty="0"/>
-              <a:t>A 說這是 acrolein 造成的早發型，B 說是晚發型 BK-HC，C 說 ciprofloxacin 預防可以避免，D 說膀胱灌洗比 hyperhydration 好，E 說應該每週監測 BK 做 pre-emptive 治療。先判斷時間點，再看病毒量。</a:t>
+              <a:t>A 說這是 acrolein 造成的早發型，B 說是晚發型 BK-HC，C 說 ciprofloxacin 預防可以避免，D 說膀胱灌洗比 hyperhydration 好，E 說應該每週監測 BK 做 pre-emptive 治療。先判斷時間點，再看病毒量。時間點和病毒量都已經寫在題目裡。</a:t>
             </a:r>
           </a:p>
           <a:p>
@@ -2451,6 +2561,17 @@
               <a:t>A 是主要陷阱，題目刻意寫 PTCy，讓人想到 acrolein，但早發型發生在 CY 給完後 48 小時內，不是第四週。C 的 fluoroquinolone 臨床上沒有降低 HC，書上不建議。D 的膀胱灌洗沒有比 hyperhydration 好。E 也錯，因為沒有確立的 pre-emptive 治療，書上不建議常規監測 BK。</a:t>
             </a:r>
           </a:p>
+          <a:p>
+            <a:pPr>
+              <a:spcAft>
+                <a:spcPts val="600"/>
+              </a:spcAft>
+            </a:pPr>
+            <a:r>
+              <a:rPr lang="en-US" dirty="0"/>
+              <a:t>治療之後，viruria 和 viremia 下降和臨床改善是平行的，可以用來追蹤反應。這題的關鍵是時間點，PTCy 和 mesna 是用來混淆的資訊。</a:t>
+            </a:r>
+          </a:p>
         </p:txBody>
       </p:sp>
       <p:sp>
@@ -3229,6 +3350,17 @@
               <a:t>時間點兩邊相反。出血集中在早期血小板最低的時候，血栓多在 engraftment 之後，過去有 VTE 或有 GVHD 的人風險更高。</a:t>
             </a:r>
           </a:p>
+          <a:p>
+            <a:pPr>
+              <a:spcAft>
+                <a:spcPts val="600"/>
+              </a:spcAft>
+            </a:pPr>
+            <a:r>
+              <a:rPr lang="en-US" dirty="0"/>
+              <a:t>考試問的通常是方向，不是精確數字。出血大約是 VTE 的三倍，VTE 七成以上和導管有關，allo 高於 auto，有 GVHD 再更高，記住這幾個方向就足以應付大部分題目。</a:t>
+            </a:r>
+          </a:p>
         </p:txBody>
       </p:sp>
       <p:sp>
@@ -3365,6 +3497,17 @@
               <a:t>右邊是門診帶著導管的病人，不建議常規預防。50 這個門檻考試很常出，題目常給 40 左右的數字，問要不要開始預防。</a:t>
             </a:r>
           </a:p>
+          <a:p>
+            <a:pPr>
+              <a:spcAft>
+                <a:spcPts val="600"/>
+              </a:spcAft>
+            </a:pPr>
+            <a:r>
+              <a:rPr lang="en-US" dirty="0"/>
+              <a:t>Myeloma 這一群的細節，包括 maintenance 的選擇，第 27 堂會再講；今天只要記得 IMiD 是移植病人少數明確需要預防的情境。另外 Pihusch 的資料顯示，就算每天打 heparin 預防 SOS，VTE 仍然會發生，預防並不等於零風險。</a:t>
+            </a:r>
+          </a:p>
         </p:txBody>
       </p:sp>
       <p:sp>
@@ -3490,6 +3633,17 @@
               <a:t>最下面兩行是導管。WARP 收了 1590 人，調整劑量 warfarin 讓 INR 維持 1.5 到 2，有症狀的 CRT 從 5.9% 降到 2.7%，但 major bleeding 增加。後來的 meta-analysis 認為 warfarin 和 LMWH 都沒有顯著減少 CRT，所以不常規預防。</a:t>
             </a:r>
           </a:p>
+          <a:p>
+            <a:pPr>
+              <a:spcAft>
+                <a:spcPts val="600"/>
+              </a:spcAft>
+            </a:pPr>
+            <a:r>
+              <a:rPr lang="en-US" dirty="0"/>
+              <a:t>這張的訊息是，移植病人的預防建議其實是外推出來的。題目若問哪一群有隨機試驗證據，答案會落在癌症病人或內科住院病人，而不是移植病人。</a:t>
+            </a:r>
+          </a:p>
         </p:txBody>
       </p:sp>
       <p:sp>
@@ -3769,6 +3923,17 @@
               </a:spcAft>
             </a:pPr>
             <a:r>
+              <a:rPr lang="en-US" dirty="0"/>
+              <a:t>臨床上的順序可以記成三步，先看血小板有沒有過 50，再看 GFR 有沒有過 30，最後依惡性疾病和 IMiD 是否持續決定療程。題目給的數字通常就落在這兩個門檻附近，例如血小板 45 或 GFR 28，要一眼看出它在門檻的哪一邊。</a:t>
+            </a:r>
+          </a:p>
+          <a:p>
+            <a:pPr>
+              <a:spcAft>
+                <a:spcPts val="600"/>
+              </a:spcAft>
+            </a:pPr>
+            <a:r>
               <a:rPr lang="en-US" b="1" dirty="0"/>
               <a:t>講者提醒（不念出來）：</a:t>
             </a:r>
@@ -3929,6 +4094,17 @@
             <a:r>
               <a:rPr lang="en-US" dirty="0"/>
               <a:t>最右邊，急性 DVT 但完全不能抗凝，才考慮 IVC filter，等可以抗凝就要移除。整張圖只有 50 和 25 兩個數字，記住它們就能推回整個流程。</a:t>
+            </a:r>
+          </a:p>
+          <a:p>
+            <a:pPr>
+              <a:spcAft>
+                <a:spcPts val="600"/>
+              </a:spcAft>
+            </a:pPr>
+            <a:r>
+              <a:rPr lang="en-US" dirty="0"/>
+              <a:t>減量 LMWH 和輸血小板這兩條，書上都寫成某些中心的做法或作者的經驗，也沒有給減量的確切劑量，所以考題比較可能考 50 這個門檻。</a:t>
             </a:r>
           </a:p>
         </p:txBody>

--- a/slides/decks/s14-bleeding-thrombosis-kidney.pptx
+++ b/slides/decks/s14-bleeding-thrombosis-kidney.pptx
@@ -134,13 +134,13 @@
   <p:extLst>
     <p:ext uri="{521415D9-36F7-43E2-AB2F-B90AF26B5E84}">
       <p14:sectionLst xmlns:p14="http://schemas.microsoft.com/office/powerpoint/2010/main">
-        <p14:section name="Opening" id="{59f20d23-4c85-0f78-ce67-01211b65e84b}">
+        <p14:section name="Opening" id="{0386bda0-ee7a-d67f-eb87-3e58240254fb}">
           <p14:sldIdLst>
             <p14:sldId id="256"/>
             <p14:sldId id="257"/>
           </p14:sldIdLst>
         </p14:section>
-        <p14:section name="Thrombosis: risk and prophylaxis" id="{c6793dde-bedf-b609-a396-70437a39c02b}">
+        <p14:section name="Thrombosis: risk and prophylaxis" id="{b812fd69-ce5a-e616-2d81-4e360ef4f6b8}">
           <p14:sldIdLst>
             <p14:sldId id="258"/>
             <p14:sldId id="259"/>
@@ -149,7 +149,7 @@
             <p14:sldId id="262"/>
           </p14:sldIdLst>
         </p14:section>
-        <p14:section name="Treating VTE and CRT; bleeding" id="{e92ea498-cd8e-65e8-64a7-d0232a04bbfd}">
+        <p14:section name="Treating VTE and CRT; bleeding" id="{2b68d8de-5240-b89e-0c2f-bbb321cd7c27}">
           <p14:sldIdLst>
             <p14:sldId id="263"/>
             <p14:sldId id="264"/>
@@ -157,7 +157,7 @@
             <p14:sldId id="266"/>
           </p14:sldIdLst>
         </p14:section>
-        <p14:section name="Haemorrhagic cystitis and kidney" id="{e87f1d6e-386b-6293-7fe1-6cfe485af7a1}">
+        <p14:section name="Haemorrhagic cystitis and kidney" id="{2ee331c1-8f51-5d3e-1b32-97a5054dc0db}">
           <p14:sldIdLst>
             <p14:sldId id="267"/>
             <p14:sldId id="268"/>
@@ -166,7 +166,7 @@
             <p14:sldId id="271"/>
           </p14:sldIdLst>
         </p14:section>
-        <p14:section name="Board questions" id="{1d13a208-853f-2f97-0124-dcf160dac742}">
+        <p14:section name="Board questions" id="{ec6ab69b-3b9f-b93b-1dc3-82e854312f88}">
           <p14:sldIdLst>
             <p14:sldId id="272"/>
             <p14:sldId id="273"/>
@@ -176,14 +176,14 @@
             <p14:sldId id="277"/>
           </p14:sldIdLst>
         </p14:section>
-        <p14:section name="References" id="{aa04fe14-149b-5686-4f64-68a9f0b08f84}">
+        <p14:section name="References" id="{0416ccca-cdbc-46f9-f85e-c5e5123fb425}">
           <p14:sldIdLst>
             <p14:sldId id="278"/>
             <p14:sldId id="279"/>
             <p14:sldId id="280"/>
           </p14:sldIdLst>
         </p14:section>
-        <p14:section name="Backup" id="{687fdcca-fa36-b127-a475-8d379c8263f6}">
+        <p14:section name="Backup" id="{cfda6987-4b8d-5f86-1f59-2069941d0c6c}">
           <p14:sldIdLst>
             <p14:sldId id="281"/>
             <p14:sldId id="282"/>
@@ -8868,7 +8868,7 @@
         </p:nvSpPr>
         <p:spPr>
           <a:xfrm>
-            <a:off x="685800" y="4434840"/>
+            <a:off x="685800" y="4846320"/>
             <a:ext cx="10817352" cy="411480"/>
           </a:xfrm>
           <a:prstGeom prst="rect">
@@ -9563,9 +9563,9 @@
             <a:tbl>
               <a:tblPr/>
               <a:tblGrid>
-                <a:gridCol w="3209544"/>
-                <a:gridCol w="3941064"/>
+                <a:gridCol w="3026664"/>
                 <a:gridCol w="3666744"/>
+                <a:gridCol w="4123944"/>
               </a:tblGrid>
               <a:tr h="0">
                 <a:tc>
@@ -11364,7 +11364,7 @@
         </p:nvSpPr>
         <p:spPr>
           <a:xfrm>
-            <a:off x="685800" y="4160520"/>
+            <a:off x="685800" y="4343400"/>
             <a:ext cx="10817352" cy="411480"/>
           </a:xfrm>
           <a:prstGeom prst="rect">
@@ -17321,7 +17321,7 @@
         </p:nvSpPr>
         <p:spPr>
           <a:xfrm>
-            <a:off x="685800" y="4480560"/>
+            <a:off x="685800" y="3931920"/>
             <a:ext cx="10817352" cy="411480"/>
           </a:xfrm>
           <a:prstGeom prst="rect">
@@ -19952,7 +19952,7 @@
                   <a:schemeClr val="tx1"/>
                 </a:solidFill>
               </a:rPr>
-              <a:t>Inpatient or post-op</a:t>
+              <a:t>Inpatient, no bleeding</a:t>
             </a:r>
             <a:endParaRPr lang="en-US" sz="1400" dirty="0"/>
           </a:p>
@@ -19994,7 +19994,7 @@
                   <a:schemeClr val="tx1"/>
                 </a:solidFill>
               </a:rPr>
-              <a:t>Platelets &gt; 50 × 10⁹/L, no bleeding</a:t>
+              <a:t>Platelets &gt; 50 × 10⁹/L</a:t>
             </a:r>
             <a:endParaRPr lang="en-US" sz="1600" dirty="0"/>
           </a:p>
@@ -24040,7 +24040,7 @@
                   <a:schemeClr val="tx1"/>
                 </a:solidFill>
               </a:rPr>
-              <a:t>Weigh benefit against bleeding</a:t>
+              <a:t>Balance bleeding risk</a:t>
             </a:r>
             <a:endParaRPr lang="en-US" sz="1500" dirty="0"/>
           </a:p>

--- a/slides/decks/s14-bleeding-thrombosis-kidney.pptx
+++ b/slides/decks/s14-bleeding-thrombosis-kidney.pptx
@@ -134,13 +134,13 @@
   <p:extLst>
     <p:ext uri="{521415D9-36F7-43E2-AB2F-B90AF26B5E84}">
       <p14:sectionLst xmlns:p14="http://schemas.microsoft.com/office/powerpoint/2010/main">
-        <p14:section name="Opening" id="{0386bda0-ee7a-d67f-eb87-3e58240254fb}">
+        <p14:section name="Opening" id="{7ccb8a4c-e253-c6ed-0e49-8eab6d104fae}">
           <p14:sldIdLst>
             <p14:sldId id="256"/>
             <p14:sldId id="257"/>
           </p14:sldIdLst>
         </p14:section>
-        <p14:section name="Thrombosis: risk and prophylaxis" id="{b812fd69-ce5a-e616-2d81-4e360ef4f6b8}">
+        <p14:section name="Thrombosis: risk and prophylaxis" id="{1a4012b2-1dcd-f5f8-cbbf-e69f995a3f91}">
           <p14:sldIdLst>
             <p14:sldId id="258"/>
             <p14:sldId id="259"/>
@@ -149,7 +149,7 @@
             <p14:sldId id="262"/>
           </p14:sldIdLst>
         </p14:section>
-        <p14:section name="Treating VTE and CRT; bleeding" id="{2b68d8de-5240-b89e-0c2f-bbb321cd7c27}">
+        <p14:section name="Treating VTE and CRT; bleeding" id="{626dc42b-6e34-58ba-a2a2-03275efbe739}">
           <p14:sldIdLst>
             <p14:sldId id="263"/>
             <p14:sldId id="264"/>
@@ -157,7 +157,7 @@
             <p14:sldId id="266"/>
           </p14:sldIdLst>
         </p14:section>
-        <p14:section name="Haemorrhagic cystitis and kidney" id="{2ee331c1-8f51-5d3e-1b32-97a5054dc0db}">
+        <p14:section name="Haemorrhagic cystitis and kidney" id="{72c87b6a-4f85-b24e-f159-11eee042e032}">
           <p14:sldIdLst>
             <p14:sldId id="267"/>
             <p14:sldId id="268"/>
@@ -166,7 +166,7 @@
             <p14:sldId id="271"/>
           </p14:sldIdLst>
         </p14:section>
-        <p14:section name="Board questions" id="{ec6ab69b-3b9f-b93b-1dc3-82e854312f88}">
+        <p14:section name="Board questions" id="{142184c9-af3a-cc17-1329-f703ec1d2059}">
           <p14:sldIdLst>
             <p14:sldId id="272"/>
             <p14:sldId id="273"/>
@@ -176,14 +176,14 @@
             <p14:sldId id="277"/>
           </p14:sldIdLst>
         </p14:section>
-        <p14:section name="References" id="{0416ccca-cdbc-46f9-f85e-c5e5123fb425}">
+        <p14:section name="References" id="{ef419aec-452e-9db5-d075-696122e67439}">
           <p14:sldIdLst>
             <p14:sldId id="278"/>
             <p14:sldId id="279"/>
             <p14:sldId id="280"/>
           </p14:sldIdLst>
         </p14:section>
-        <p14:section name="Backup" id="{cfda6987-4b8d-5f86-1f59-2069941d0c6c}">
+        <p14:section name="Backup" id="{e90e413b-5bfe-7f90-f7f7-b137221b75b2}">
           <p14:sldIdLst>
             <p14:sldId id="281"/>
             <p14:sldId id="282"/>
